--- a/dsst289-f25/pslides/experiments.pptx
+++ b/dsst289-f25/pslides/experiments.pptx
@@ -335,7 +335,7 @@
           <a:p>
             <a:fld id="{8506FD97-06DD-F440-872A-88DBAAB42D3E}" type="datetimeFigureOut">
               <a:rPr lang="fr-FR" smtClean="0"/>
-              <a:t>19/10/2025</a:t>
+              <a:t>20/10/2025</a:t>
             </a:fld>
             <a:endParaRPr lang="fr-FR"/>
           </a:p>
@@ -533,7 +533,7 @@
           <a:p>
             <a:fld id="{8506FD97-06DD-F440-872A-88DBAAB42D3E}" type="datetimeFigureOut">
               <a:rPr lang="fr-FR" smtClean="0"/>
-              <a:t>19/10/2025</a:t>
+              <a:t>20/10/2025</a:t>
             </a:fld>
             <a:endParaRPr lang="fr-FR"/>
           </a:p>
@@ -741,7 +741,7 @@
           <a:p>
             <a:fld id="{8506FD97-06DD-F440-872A-88DBAAB42D3E}" type="datetimeFigureOut">
               <a:rPr lang="fr-FR" smtClean="0"/>
-              <a:t>19/10/2025</a:t>
+              <a:t>20/10/2025</a:t>
             </a:fld>
             <a:endParaRPr lang="fr-FR"/>
           </a:p>
@@ -939,7 +939,7 @@
           <a:p>
             <a:fld id="{8506FD97-06DD-F440-872A-88DBAAB42D3E}" type="datetimeFigureOut">
               <a:rPr lang="fr-FR" smtClean="0"/>
-              <a:t>19/10/2025</a:t>
+              <a:t>20/10/2025</a:t>
             </a:fld>
             <a:endParaRPr lang="fr-FR"/>
           </a:p>
@@ -1214,7 +1214,7 @@
           <a:p>
             <a:fld id="{8506FD97-06DD-F440-872A-88DBAAB42D3E}" type="datetimeFigureOut">
               <a:rPr lang="fr-FR" smtClean="0"/>
-              <a:t>19/10/2025</a:t>
+              <a:t>20/10/2025</a:t>
             </a:fld>
             <a:endParaRPr lang="fr-FR"/>
           </a:p>
@@ -1479,7 +1479,7 @@
           <a:p>
             <a:fld id="{8506FD97-06DD-F440-872A-88DBAAB42D3E}" type="datetimeFigureOut">
               <a:rPr lang="fr-FR" smtClean="0"/>
-              <a:t>19/10/2025</a:t>
+              <a:t>20/10/2025</a:t>
             </a:fld>
             <a:endParaRPr lang="fr-FR"/>
           </a:p>
@@ -1891,7 +1891,7 @@
           <a:p>
             <a:fld id="{8506FD97-06DD-F440-872A-88DBAAB42D3E}" type="datetimeFigureOut">
               <a:rPr lang="fr-FR" smtClean="0"/>
-              <a:t>19/10/2025</a:t>
+              <a:t>20/10/2025</a:t>
             </a:fld>
             <a:endParaRPr lang="fr-FR"/>
           </a:p>
@@ -2032,7 +2032,7 @@
           <a:p>
             <a:fld id="{8506FD97-06DD-F440-872A-88DBAAB42D3E}" type="datetimeFigureOut">
               <a:rPr lang="fr-FR" smtClean="0"/>
-              <a:t>19/10/2025</a:t>
+              <a:t>20/10/2025</a:t>
             </a:fld>
             <a:endParaRPr lang="fr-FR"/>
           </a:p>
@@ -2145,7 +2145,7 @@
           <a:p>
             <a:fld id="{8506FD97-06DD-F440-872A-88DBAAB42D3E}" type="datetimeFigureOut">
               <a:rPr lang="fr-FR" smtClean="0"/>
-              <a:t>19/10/2025</a:t>
+              <a:t>20/10/2025</a:t>
             </a:fld>
             <a:endParaRPr lang="fr-FR"/>
           </a:p>
@@ -2456,7 +2456,7 @@
           <a:p>
             <a:fld id="{8506FD97-06DD-F440-872A-88DBAAB42D3E}" type="datetimeFigureOut">
               <a:rPr lang="fr-FR" smtClean="0"/>
-              <a:t>19/10/2025</a:t>
+              <a:t>20/10/2025</a:t>
             </a:fld>
             <a:endParaRPr lang="fr-FR"/>
           </a:p>
@@ -2744,7 +2744,7 @@
           <a:p>
             <a:fld id="{8506FD97-06DD-F440-872A-88DBAAB42D3E}" type="datetimeFigureOut">
               <a:rPr lang="fr-FR" smtClean="0"/>
-              <a:t>19/10/2025</a:t>
+              <a:t>20/10/2025</a:t>
             </a:fld>
             <a:endParaRPr lang="fr-FR"/>
           </a:p>
@@ -2985,7 +2985,7 @@
           <a:p>
             <a:fld id="{8506FD97-06DD-F440-872A-88DBAAB42D3E}" type="datetimeFigureOut">
               <a:rPr lang="fr-FR" smtClean="0"/>
-              <a:t>19/10/2025</a:t>
+              <a:t>20/10/2025</a:t>
             </a:fld>
             <a:endParaRPr lang="fr-FR"/>
           </a:p>
@@ -9406,7 +9406,7 @@
           </a:p>
           <a:p>
             <a:r>
-              <a:rPr lang="en-US" sz="2400" noProof="0" dirty="0">
+              <a:rPr lang="en-US" sz="2400" dirty="0">
                 <a:solidFill>
                   <a:schemeClr val="bg1">
                     <a:lumMod val="75000"/>
@@ -9416,9 +9416,10 @@
               <a:t>13. </a:t>
             </a:r>
             <a:r>
-              <a:rPr lang="en-US" sz="2400" b="1" noProof="0" dirty="0"/>
-              <a:t>fuck</a:t>
-            </a:r>
+              <a:rPr lang="en-US" sz="2400" b="1" dirty="0"/>
+              <a:t>carpet</a:t>
+            </a:r>
+            <a:endParaRPr lang="en-US" sz="2400" b="1" noProof="0" dirty="0"/>
           </a:p>
           <a:p>
             <a:r>
@@ -9433,7 +9434,7 @@
             </a:r>
             <a:r>
               <a:rPr lang="en-US" sz="2400" b="1" noProof="0" dirty="0"/>
-              <a:t>cold</a:t>
+              <a:t>fuck</a:t>
             </a:r>
           </a:p>
           <a:p>
@@ -9449,7 +9450,7 @@
             </a:r>
             <a:r>
               <a:rPr lang="en-US" sz="2400" b="1" noProof="0" dirty="0"/>
-              <a:t>river</a:t>
+              <a:t>cold</a:t>
             </a:r>
           </a:p>
           <a:p>
@@ -9465,7 +9466,7 @@
             </a:r>
             <a:r>
               <a:rPr lang="en-US" sz="2400" b="1" noProof="0" dirty="0"/>
-              <a:t>metal</a:t>
+              <a:t>river</a:t>
             </a:r>
           </a:p>
           <a:p>
@@ -9481,7 +9482,7 @@
             </a:r>
             <a:r>
               <a:rPr lang="en-US" sz="2400" b="1" noProof="0" dirty="0"/>
-              <a:t>slow</a:t>
+              <a:t>metal</a:t>
             </a:r>
           </a:p>
           <a:p>
